--- a/Lecture slides/NYT B04 - Design Science Research.pptx
+++ b/Lecture slides/NYT B04 - Design Science Research.pptx
@@ -5837,7 +5837,7 @@
             </a:pPr>
             <a:r>
               <a:rPr lang="en"/>
-              <a:t>Dirk Riehle, Univ. Erlangen</a:t>
+              <a:t>Dirk Riehle, FAU Erlangen</a:t>
             </a:r>
             <a:endParaRPr/>
           </a:p>
@@ -6327,7 +6327,7 @@
             <a:tbl>
               <a:tblPr>
                 <a:noFill/>
-                <a:tableStyleId>{583C970E-BC8D-4518-90A5-38E2BEFE84A2}</a:tableStyleId>
+                <a:tableStyleId>{829A2A7C-E2D3-434F-873A-8C2D01426A31}</a:tableStyleId>
               </a:tblPr>
               <a:tblGrid>
                 <a:gridCol w="640600"/>
@@ -8491,7 +8491,7 @@
             <a:tbl>
               <a:tblPr>
                 <a:noFill/>
-                <a:tableStyleId>{583C970E-BC8D-4518-90A5-38E2BEFE84A2}</a:tableStyleId>
+                <a:tableStyleId>{829A2A7C-E2D3-434F-873A-8C2D01426A31}</a:tableStyleId>
               </a:tblPr>
               <a:tblGrid>
                 <a:gridCol w="640600"/>
@@ -9999,7 +9999,7 @@
             <a:tbl>
               <a:tblPr>
                 <a:noFill/>
-                <a:tableStyleId>{583C970E-BC8D-4518-90A5-38E2BEFE84A2}</a:tableStyleId>
+                <a:tableStyleId>{829A2A7C-E2D3-434F-873A-8C2D01426A31}</a:tableStyleId>
               </a:tblPr>
               <a:tblGrid>
                 <a:gridCol w="640725"/>
